--- a/_slides/remanies/12. GEN_slides.pptx
+++ b/_slides/remanies/12. GEN_slides.pptx
@@ -1031,7 +1031,7 @@
               <a:t>retirer</a:t>
             </a:r>
             <a:r>
-              <a:t> rend une </a:t>
+              <a:t> retourne une </a:t>
             </a:r>
             <a:r>
               <a:rPr>
@@ -1413,7 +1413,7 @@
               <a:t>retirer</a:t>
             </a:r>
             <a:r>
-              <a:t> qui rend un </a:t>
+              <a:t> qui retourne un </a:t>
             </a:r>
             <a:r>
               <a:rPr>
@@ -1718,7 +1718,7 @@
               <a:t>readObject</a:t>
             </a:r>
             <a:r>
-              <a:t> rend un </a:t>
+              <a:t> retourne un </a:t>
             </a:r>
             <a:r>
               <a:rPr>
@@ -2735,7 +2735,7 @@
               <a:t>T</a:t>
             </a:r>
             <a:r>
-              <a:t>. Il sait alors que l'appel rend une </a:t>
+              <a:t>. Il sait alors que l'appel retourne une </a:t>
             </a:r>
             <a:r>
               <a:rPr>
@@ -2865,7 +2865,7 @@
           </a:p>
           <a:p>
             <a:r>
-              <a:t>C'est une fabrique, au sens du module STA : une méthode statique qui construit et rend un objet prêt à servir.</a:t>
+              <a:t>C'est une fabrique, au sens du module STA : une méthode statique qui construit et retourne un objet prêt à servir.</a:t>
             </a:r>
           </a:p>
         </p:txBody>
@@ -3182,7 +3182,7 @@
               <a:t>retirer</a:t>
             </a:r>
             <a:r>
-              <a:t> rend un </a:t>
+              <a:t> retourne un </a:t>
             </a:r>
             <a:r>
               <a:rPr>
@@ -9305,7 +9305,7 @@
             </a:pPr>
             <a:r>
               <a:rPr sz="2800"/>
-              <a:t>Un argument de type peut porter lui-même des chevrons</a:t>
+              <a:t>Un argument de type peut contenir lui-même des chevrons</a:t>
             </a:r>
           </a:p>
           <a:p>
@@ -22047,7 +22047,7 @@
             </a:r>
             <a:r>
               <a:rPr sz="2600"/>
-              <a:t>, qui rend un </a:t>
+              <a:t>, qui retourne un </a:t>
             </a:r>
             <a:r>
               <a:rPr sz="2200">
